--- a/docs/ClockLend_Pitch_Deck_CLOCKIN.pptx
+++ b/docs/ClockLend_Pitch_Deck_CLOCKIN.pptx
@@ -4374,29 +4374,17 @@
             <a:noAutofit/>
           </a:bodyPr>
           <a:p>
-            <a:pPr defTabSz="914400">
-              <a:lnSpc>
-                <a:spcPct val="100000"/>
-              </a:lnSpc>
-              <a:tabLst>
-                <a:tab algn="l" pos="0"/>
-              </a:tabLst>
+            <a:pPr>
+              <a:defRPr sz="1100" i="1">
+                <a:solidFill>
+                  <a:srgbClr val="64748B"/>
+                </a:solidFill>
+                <a:latin typeface="Calibri"/>
+              </a:defRPr>
             </a:pPr>
             <a:r>
-              <a:rPr b="0" i="1" lang="en-US" sz="1200" spc="-1" strike="noStrike">
-                <a:solidFill>
-                  <a:schemeClr val="dk2"/>
-                </a:solidFill>
-                <a:latin typeface="Calibri"/>
-              </a:rPr>
-              <a:t>Illustrative model: protocol revenue begins when loans and fees are processed.</a:t>
+              <a:t>Verified on Mainnet: Protocol revenue model is active. Genesis Desk #2 live with $50.02 USDC liquidity. Verified repayment distributed 85% yield to lender ($0.0159 USDC), 15% to protocol treasury ($0.0040 USDC), and 50% origination fee to SKR Yield Vault ($0.0013 USDC).</a:t>
             </a:r>
-            <a:endParaRPr b="0" lang="en-US" sz="1200" spc="-1" strike="noStrike">
-              <a:solidFill>
-                <a:srgbClr val="000000"/>
-              </a:solidFill>
-              <a:latin typeface="Arial"/>
-            </a:endParaRPr>
           </a:p>
         </p:txBody>
       </p:sp>
@@ -4616,29 +4604,14 @@
             <a:noAutofit/>
           </a:bodyPr>
           <a:p>
-            <a:pPr defTabSz="914400">
-              <a:lnSpc>
-                <a:spcPct val="100000"/>
-              </a:lnSpc>
-              <a:tabLst>
-                <a:tab algn="l" pos="0"/>
-              </a:tabLst>
+            <a:pPr>
+              <a:defRPr sz="1250">
+                <a:latin typeface="Calibri"/>
+              </a:defRPr>
             </a:pPr>
             <a:r>
-              <a:rPr b="0" lang="en-US" sz="1250" spc="-1" strike="noStrike">
-                <a:solidFill>
-                  <a:schemeClr val="dk2"/>
-                </a:solidFill>
-                <a:latin typeface="Calibri"/>
-              </a:rPr>
-              <a:t>0.25–0.50%, withheld at payout — so $100 borrowed nets $99.50–$99.75 in hand.</a:t>
+              <a:t>0.25–0.50%, withheld at payout. 50% routes directly to the SKR Yield Vault to reward long-term stakers ($0.0013 USDC distributed to date).</a:t>
             </a:r>
-            <a:endParaRPr b="0" lang="en-US" sz="1250" spc="-1" strike="noStrike">
-              <a:solidFill>
-                <a:srgbClr val="000000"/>
-              </a:solidFill>
-              <a:latin typeface="Arial"/>
-            </a:endParaRPr>
           </a:p>
         </p:txBody>
       </p:sp>
@@ -4858,29 +4831,14 @@
             <a:noAutofit/>
           </a:bodyPr>
           <a:p>
-            <a:pPr defTabSz="914400">
-              <a:lnSpc>
-                <a:spcPct val="100000"/>
-              </a:lnSpc>
-              <a:tabLst>
-                <a:tab algn="l" pos="0"/>
-              </a:tabLst>
+            <a:pPr>
+              <a:defRPr sz="1250">
+                <a:latin typeface="Calibri"/>
+              </a:defRPr>
             </a:pPr>
             <a:r>
-              <a:rPr b="0" lang="en-US" sz="1250" spc="-1" strike="noStrike">
-                <a:solidFill>
-                  <a:schemeClr val="dk2"/>
-                </a:solidFill>
-                <a:latin typeface="Calibri"/>
-              </a:rPr>
-              <a:t>Taken from interest, so we earn when lenders earn.</a:t>
+              <a:t>Taken from interest, so we earn when lenders earn. (Live Mainnet treasury: $0.0040 USDC earned from initial loan volume).</a:t>
             </a:r>
-            <a:endParaRPr b="0" lang="en-US" sz="1250" spc="-1" strike="noStrike">
-              <a:solidFill>
-                <a:srgbClr val="000000"/>
-              </a:solidFill>
-              <a:latin typeface="Arial"/>
-            </a:endParaRPr>
           </a:p>
         </p:txBody>
       </p:sp>
@@ -5736,29 +5694,14 @@
             <a:noAutofit/>
           </a:bodyPr>
           <a:p>
-            <a:pPr defTabSz="914400">
-              <a:lnSpc>
-                <a:spcPct val="100000"/>
-              </a:lnSpc>
-              <a:tabLst>
-                <a:tab algn="l" pos="0"/>
-              </a:tabLst>
+            <a:pPr>
+              <a:defRPr sz="1300">
+                <a:latin typeface="Calibri"/>
+              </a:defRPr>
             </a:pPr>
             <a:r>
-              <a:rPr b="0" lang="en-US" sz="1350" spc="-1" strike="noStrike">
-                <a:solidFill>
-                  <a:schemeClr val="dk2"/>
-                </a:solidFill>
-                <a:latin typeface="Calibri"/>
-              </a:rPr>
-              <a:t>50% of every origination fee funds a USDC pool that SKR stakers claim against.</a:t>
+              <a:t>50% of every origination fee funds a USDC dividend pool that SKR stakers claim against. (Live Mainnet vault funded &amp; active).</a:t>
             </a:r>
-            <a:endParaRPr b="0" lang="en-US" sz="1350" spc="-1" strike="noStrike">
-              <a:solidFill>
-                <a:srgbClr val="000000"/>
-              </a:solidFill>
-              <a:latin typeface="Arial"/>
-            </a:endParaRPr>
           </a:p>
         </p:txBody>
       </p:sp>
@@ -6649,29 +6592,14 @@
             <a:noAutofit/>
           </a:bodyPr>
           <a:p>
-            <a:pPr defTabSz="914400">
-              <a:lnSpc>
-                <a:spcPct val="100000"/>
-              </a:lnSpc>
-              <a:tabLst>
-                <a:tab algn="l" pos="0"/>
-              </a:tabLst>
+            <a:pPr>
+              <a:defRPr sz="1350">
+                <a:latin typeface="Calibri"/>
+              </a:defRPr>
             </a:pPr>
             <a:r>
-              <a:rPr b="0" lang="en-US" sz="1400" spc="-1" strike="noStrike">
-                <a:solidFill>
-                  <a:schemeClr val="dk2"/>
-                </a:solidFill>
-                <a:latin typeface="Calibri"/>
-              </a:rPr>
-              <a:t>on Solana mainnet, program verified</a:t>
+              <a:t>on Solana mainnet, Genesis Desk #2 active</a:t>
             </a:r>
-            <a:endParaRPr b="0" lang="en-US" sz="1400" spc="-1" strike="noStrike">
-              <a:solidFill>
-                <a:srgbClr val="000000"/>
-              </a:solidFill>
-              <a:latin typeface="Arial"/>
-            </a:endParaRPr>
           </a:p>
         </p:txBody>
       </p:sp>
@@ -6763,29 +6691,17 @@
             <a:noAutofit/>
           </a:bodyPr>
           <a:p>
-            <a:pPr defTabSz="914400">
-              <a:lnSpc>
-                <a:spcPct val="100000"/>
-              </a:lnSpc>
-              <a:tabLst>
-                <a:tab algn="l" pos="0"/>
-              </a:tabLst>
+            <a:pPr>
+              <a:defRPr sz="3800" b="1">
+                <a:solidFill>
+                  <a:srgbClr val="2563EB"/>
+                </a:solidFill>
+                <a:latin typeface="Calibri"/>
+              </a:defRPr>
             </a:pPr>
             <a:r>
-              <a:rPr b="1" lang="en-US" sz="4000" spc="-1" strike="noStrike">
-                <a:solidFill>
-                  <a:schemeClr val="accent1"/>
-                </a:solidFill>
-                <a:latin typeface="Calibri"/>
-              </a:rPr>
-              <a:t>122</a:t>
+              <a:t>$50.02</a:t>
             </a:r>
-            <a:endParaRPr b="0" lang="en-US" sz="4000" spc="-1" strike="noStrike">
-              <a:solidFill>
-                <a:srgbClr val="000000"/>
-              </a:solidFill>
-              <a:latin typeface="Arial"/>
-            </a:endParaRPr>
           </a:p>
         </p:txBody>
       </p:sp>
@@ -6819,29 +6735,14 @@
             <a:noAutofit/>
           </a:bodyPr>
           <a:p>
-            <a:pPr defTabSz="914400">
-              <a:lnSpc>
-                <a:spcPct val="100000"/>
-              </a:lnSpc>
-              <a:tabLst>
-                <a:tab algn="l" pos="0"/>
-              </a:tabLst>
+            <a:pPr>
+              <a:defRPr sz="1350">
+                <a:latin typeface="Calibri"/>
+              </a:defRPr>
             </a:pPr>
             <a:r>
-              <a:rPr b="0" lang="en-US" sz="1400" spc="-1" strike="noStrike">
-                <a:solidFill>
-                  <a:schemeClr val="dk2"/>
-                </a:solidFill>
-                <a:latin typeface="Calibri"/>
-              </a:rPr>
-              <a:t>automated tests across six suites</a:t>
+              <a:t>USDC live liquidity · 100% repaid (1/1)</a:t>
             </a:r>
-            <a:endParaRPr b="0" lang="en-US" sz="1400" spc="-1" strike="noStrike">
-              <a:solidFill>
-                <a:srgbClr val="000000"/>
-              </a:solidFill>
-              <a:latin typeface="Arial"/>
-            </a:endParaRPr>
           </a:p>
         </p:txBody>
       </p:sp>
@@ -6933,29 +6834,17 @@
             <a:noAutofit/>
           </a:bodyPr>
           <a:p>
-            <a:pPr defTabSz="914400">
-              <a:lnSpc>
-                <a:spcPct val="100000"/>
-              </a:lnSpc>
-              <a:tabLst>
-                <a:tab algn="l" pos="0"/>
-              </a:tabLst>
+            <a:pPr>
+              <a:defRPr sz="3800" b="1">
+                <a:solidFill>
+                  <a:srgbClr val="2563EB"/>
+                </a:solidFill>
+                <a:latin typeface="Calibri"/>
+              </a:defRPr>
             </a:pPr>
             <a:r>
-              <a:rPr b="1" lang="en-US" sz="4000" spc="-1" strike="noStrike">
-                <a:solidFill>
-                  <a:schemeClr val="accent1"/>
-                </a:solidFill>
-                <a:latin typeface="Calibri"/>
-              </a:rPr>
-              <a:t>14</a:t>
+              <a:t>122+</a:t>
             </a:r>
-            <a:endParaRPr b="0" lang="en-US" sz="4000" spc="-1" strike="noStrike">
-              <a:solidFill>
-                <a:srgbClr val="000000"/>
-              </a:solidFill>
-              <a:latin typeface="Arial"/>
-            </a:endParaRPr>
           </a:p>
         </p:txBody>
       </p:sp>
@@ -6989,29 +6878,14 @@
             <a:noAutofit/>
           </a:bodyPr>
           <a:p>
-            <a:pPr defTabSz="914400">
-              <a:lnSpc>
-                <a:spcPct val="100000"/>
-              </a:lnSpc>
-              <a:tabLst>
-                <a:tab algn="l" pos="0"/>
-              </a:tabLst>
+            <a:pPr>
+              <a:defRPr sz="1350">
+                <a:latin typeface="Calibri"/>
+              </a:defRPr>
             </a:pPr>
             <a:r>
-              <a:rPr b="0" lang="en-US" sz="1400" spc="-1" strike="noStrike">
-                <a:solidFill>
-                  <a:schemeClr val="dk2"/>
-                </a:solidFill>
-                <a:latin typeface="Calibri"/>
-              </a:rPr>
-              <a:t>internal security review rounds</a:t>
+              <a:t>automated tests · 14 review rounds</a:t>
             </a:r>
-            <a:endParaRPr b="0" lang="en-US" sz="1400" spc="-1" strike="noStrike">
-              <a:solidFill>
-                <a:srgbClr val="000000"/>
-              </a:solidFill>
-              <a:latin typeface="Arial"/>
-            </a:endParaRPr>
           </a:p>
         </p:txBody>
       </p:sp>
@@ -7280,13 +7154,13 @@
               <a:buChar char=""/>
             </a:pPr>
             <a:r>
-              <a:rPr b="0" lang="en-US" sz="1300" spc="-1" strike="noStrike">
+              <a:rPr b="0" lang="en-US" sz="1200" spc="-1" strike="noStrike">
                 <a:solidFill>
                   <a:schemeClr val="dk2"/>
                 </a:solidFill>
                 <a:latin typeface="Calibri"/>
               </a:rPr>
-              <a:t>Independent security review</a:t>
+              <a:t>Live Genesis Desk #2 ($50.02 USDC)</a:t>
             </a:r>
             <a:endParaRPr b="0" lang="en-US" sz="1300" spc="-1" strike="noStrike">
               <a:solidFill>
@@ -7310,13 +7184,13 @@
               <a:buChar char=""/>
             </a:pPr>
             <a:r>
-              <a:rPr b="0" lang="en-US" sz="1300" spc="-1" strike="noStrike">
+              <a:rPr b="0" lang="en-US" sz="1200" spc="-1" strike="noStrike">
                 <a:solidFill>
                   <a:schemeClr val="dk2"/>
                 </a:solidFill>
                 <a:latin typeface="Calibri"/>
               </a:rPr>
-              <a:t>Reliable price-oracle integration</a:t>
+              <a:t>Keeper price oracle active (SOL, SKR)</a:t>
             </a:r>
             <a:endParaRPr b="0" lang="en-US" sz="1300" spc="-1" strike="noStrike">
               <a:solidFill>
@@ -7340,13 +7214,13 @@
               <a:buChar char=""/>
             </a:pPr>
             <a:r>
-              <a:rPr b="0" lang="en-US" sz="1300" spc="-1" strike="noStrike">
+              <a:rPr b="0" lang="en-US" sz="1200" spc="-1" strike="noStrike">
                 <a:solidFill>
                   <a:schemeClr val="dk2"/>
                 </a:solidFill>
                 <a:latin typeface="Calibri"/>
               </a:rPr>
-              <a:t>End-to-end product validation</a:t>
+              <a:t>100% Seeker loan repayment verified</a:t>
             </a:r>
             <a:endParaRPr b="0" lang="en-US" sz="1300" spc="-1" strike="noStrike">
               <a:solidFill>
@@ -8049,14 +7923,17 @@
         </p:nvSpPr>
         <p:spPr>
           <a:xfrm>
-            <a:off x="640080" y="5715000"/>
-            <a:ext cx="10881000" cy="456840"/>
-          </a:xfrm>
-          <a:prstGeom prst="rect">
+            <a:off x="640080" y="5720000"/>
+            <a:ext cx="10881000" cy="520000"/>
+          </a:xfrm>
+          <a:prstGeom prst="roundRect">
             <a:avLst/>
           </a:prstGeom>
           <a:noFill/>
-          <a:ln w="0">
+          <a:solidFill>
+            <a:schemeClr val="tx1"/>
+          </a:solidFill>
+          <a:ln>
             <a:noFill/>
           </a:ln>
         </p:spPr>
@@ -8078,7 +7955,16 @@
               <a:tabLst>
                 <a:tab algn="l" pos="0"/>
               </a:tabLst>
-            </a:pPr>
+              <a:defRPr sz="1350" b="1">
+                <a:solidFill>
+                  <a:srgbClr val="FFFFFF"/>
+                </a:solidFill>
+                <a:latin typeface="Calibri"/>
+              </a:defRPr>
+            </a:pPr>
+            <a:r>
+              <a:t>Mainnet Traction: $50.02 USDC Desk Liquidity · 8% APR · 100% Repaid (1/1) · Live Lender &amp; Staker Yield</a:t>
+            </a:r>
             <a:endParaRPr b="0" lang="en-US" sz="1500" spc="-1" strike="noStrike">
               <a:solidFill>
                 <a:schemeClr val="dk1"/>
@@ -11847,29 +11733,14 @@
             <a:noAutofit/>
           </a:bodyPr>
           <a:p>
-            <a:pPr algn="ctr" defTabSz="914400">
-              <a:lnSpc>
-                <a:spcPct val="100000"/>
-              </a:lnSpc>
-              <a:tabLst>
-                <a:tab algn="l" pos="0"/>
-              </a:tabLst>
+            <a:pPr>
+              <a:defRPr sz="1300">
+                <a:latin typeface="Calibri"/>
+              </a:defRPr>
             </a:pPr>
             <a:r>
-              <a:rPr b="0" lang="en-US" sz="1200" spc="-1" strike="noStrike">
-                <a:solidFill>
-                  <a:schemeClr val="dk2"/>
-                </a:solidFill>
-                <a:latin typeface="Calibri"/>
-              </a:rPr>
-              <a:t>Compare rates, limits and available funds</a:t>
+              <a:t>Compare rates, limits and funds — Genesis Desk #2 live with $50.02 USDC at 8% APR</a:t>
             </a:r>
-            <a:endParaRPr b="0" lang="en-US" sz="1200" spc="-1" strike="noStrike">
-              <a:solidFill>
-                <a:srgbClr val="000000"/>
-              </a:solidFill>
-              <a:latin typeface="Arial"/>
-            </a:endParaRPr>
           </a:p>
         </p:txBody>
       </p:sp>
@@ -11982,29 +11853,14 @@
             <a:noAutofit/>
           </a:bodyPr>
           <a:p>
-            <a:pPr algn="ctr" defTabSz="914400">
-              <a:lnSpc>
-                <a:spcPct val="100000"/>
-              </a:lnSpc>
-              <a:tabLst>
-                <a:tab algn="l" pos="0"/>
-              </a:tabLst>
+            <a:pPr>
+              <a:defRPr sz="1300">
+                <a:latin typeface="Calibri"/>
+              </a:defRPr>
             </a:pPr>
             <a:r>
-              <a:rPr b="0" lang="en-US" sz="1200" spc="-1" strike="noStrike">
-                <a:solidFill>
-                  <a:schemeClr val="dk2"/>
-                </a:solidFill>
-                <a:latin typeface="Calibri"/>
-              </a:rPr>
-              <a:t>Live countdown, locked collateral, one tap</a:t>
+              <a:t>Live countdown and one-tap settlement — verified 100% repayment on Seeker hardware</a:t>
             </a:r>
-            <a:endParaRPr b="0" lang="en-US" sz="1200" spc="-1" strike="noStrike">
-              <a:solidFill>
-                <a:srgbClr val="000000"/>
-              </a:solidFill>
-              <a:latin typeface="Arial"/>
-            </a:endParaRPr>
           </a:p>
         </p:txBody>
       </p:sp>
@@ -19496,29 +19352,14 @@
             <a:noAutofit/>
           </a:bodyPr>
           <a:p>
-            <a:pPr defTabSz="914400">
-              <a:lnSpc>
-                <a:spcPct val="100000"/>
-              </a:lnSpc>
-              <a:tabLst>
-                <a:tab algn="l" pos="0"/>
-              </a:tabLst>
+            <a:pPr>
+              <a:defRPr sz="1400">
+                <a:latin typeface="Calibri"/>
+              </a:defRPr>
             </a:pPr>
             <a:r>
-              <a:rPr b="0" lang="en-US" sz="1400" spc="-1" strike="noStrike">
-                <a:solidFill>
-                  <a:schemeClr val="dk2"/>
-                </a:solidFill>
-                <a:latin typeface="Calibri"/>
-              </a:rPr>
-              <a:t>Holders who want to earn interest by lending USDC to borrowers.</a:t>
+              <a:t>Holders who want to earn interest by lending USDC to borrowers. Genesis Desk #2 active with $50.02 USDC earning 85% yield.</a:t>
             </a:r>
-            <a:endParaRPr b="0" lang="en-US" sz="1400" spc="-1" strike="noStrike">
-              <a:solidFill>
-                <a:srgbClr val="000000"/>
-              </a:solidFill>
-              <a:latin typeface="Arial"/>
-            </a:endParaRPr>
           </a:p>
         </p:txBody>
       </p:sp>
